--- a/docs/TeamBlueBird_InventoryOptimisationAgent_Presentation_Premium.pptx
+++ b/docs/TeamBlueBird_InventoryOptimisationAgent_Presentation_Premium.pptx
@@ -133,7 +133,7 @@
 <file path=ppt/charts/chart1.xml><?xml version="1.0" encoding="utf-8"?>
 <c:chartSpace xmlns:c="http://schemas.openxmlformats.org/drawingml/2006/chart" xmlns:a="http://schemas.openxmlformats.org/drawingml/2006/main" xmlns:r="http://schemas.openxmlformats.org/officeDocument/2006/relationships" xmlns:c16r2="http://schemas.microsoft.com/office/drawing/2015/06/chart">
   <c:date1904 val="0"/>
-  <c:lang val="en-US"/>
+  <c:lang val="en-GB"/>
   <c:roundedCorners val="1"/>
   <c:style val="2"/>
   <c:chart>
@@ -389,7 +389,7 @@
 <file path=ppt/charts/chart2.xml><?xml version="1.0" encoding="utf-8"?>
 <c:chartSpace xmlns:c="http://schemas.openxmlformats.org/drawingml/2006/chart" xmlns:a="http://schemas.openxmlformats.org/drawingml/2006/main" xmlns:r="http://schemas.openxmlformats.org/officeDocument/2006/relationships" xmlns:c16r2="http://schemas.microsoft.com/office/drawing/2015/06/chart">
   <c:date1904 val="0"/>
-  <c:lang val="en-US"/>
+  <c:lang val="en-GB"/>
   <c:roundedCorners val="1"/>
   <c:style val="2"/>
   <c:chart>
@@ -626,7 +626,7 @@
           </a:lstStyle>
           <a:p>
             <a:fld id="{B8B490CC-3775-4794-8843-0BFD45045495}" type="datetimeFigureOut">
-              <a:t>10/28/2026</a:t>
+              <a:t>10/29/26</a:t>
             </a:fld>
             <a:endParaRPr lang="en-US"/>
           </a:p>
@@ -1251,7 +1251,9 @@
               <a:t>PRESENTER: Ranjith (Implementation Lead)</a:t>
             </a:r>
           </a:p>
-          <a:p/>
+          <a:p>
+            <a:endParaRPr/>
+          </a:p>
           <a:p>
             <a:r>
               <a:t>This is the finished portal signed in as a Super Manager. The badge shows all 8 stores in scope, and the answer arrives as text and a table with a Scope line naming stores, metric and dates. The eight stores add up to 3,997,159 units on hand. Saved chats are private to each person, and the role comes from the access list at sign-in, not from anything the user types.</a:t>
@@ -1374,7 +1376,9 @@
               <a:t>PRESENTER: Ranjith (Implementation Lead)</a:t>
             </a:r>
           </a:p>
-          <a:p/>
+          <a:p>
+            <a:endParaRPr/>
+          </a:p>
           <a:p>
             <a:r>
               <a:t>Same portal, signed in as a Store Manager for Kirkland. The store is fixed by the sign-in, and row-level security in the database means other stores' rows are never returned, even if the user asks. Kirkland holds 119,941 units, compared with 3,997,159 across the network for the Super Manager. The four starter questions map to our use cases: excess stock, best sellers, capital tied up and seasonal pattern. The footer reminds users to check important decisions.</a:t>
@@ -2750,7 +2754,7 @@
           <a:p>
             <a:fld id="{5BCAD085-E8A6-8845-BD4E-CB4CCA059FC4}" type="datetimeFigureOut">
               <a:rPr lang="en-US" smtClean="0"/>
-              <a:t>10/29/2026</a:t>
+              <a:t>10/29/26</a:t>
             </a:fld>
             <a:endParaRPr lang="en-US"/>
           </a:p>
@@ -5314,7 +5318,9 @@
         <p:txBody>
           <a:bodyPr rtlCol="0" anchor="ctr"/>
           <a:lstStyle/>
-          <a:p/>
+          <a:p>
+            <a:endParaRPr/>
+          </a:p>
         </p:txBody>
       </p:sp>
     </p:spTree>
@@ -7628,7 +7634,9 @@
         <p:txBody>
           <a:bodyPr rtlCol="0" anchor="ctr"/>
           <a:lstStyle/>
-          <a:p/>
+          <a:p>
+            <a:endParaRPr/>
+          </a:p>
         </p:txBody>
       </p:sp>
       <p:sp>
@@ -7648,7 +7656,7 @@
           <a:noFill/>
         </p:spPr>
         <p:txBody>
-          <a:bodyPr wrap="square" lIns="0" rIns="0" tIns="0" bIns="0" anchor="ctr">
+          <a:bodyPr wrap="square" lIns="0" tIns="0" rIns="0" bIns="0" anchor="ctr">
             <a:spAutoFit/>
           </a:bodyPr>
           <a:lstStyle/>
@@ -7717,7 +7725,9 @@
         <p:txBody>
           <a:bodyPr rtlCol="0" anchor="ctr"/>
           <a:lstStyle/>
-          <a:p/>
+          <a:p>
+            <a:endParaRPr/>
+          </a:p>
         </p:txBody>
       </p:sp>
       <p:sp>
@@ -7737,7 +7747,7 @@
           <a:noFill/>
         </p:spPr>
         <p:txBody>
-          <a:bodyPr wrap="square" lIns="0" rIns="0" tIns="0" bIns="0" anchor="ctr">
+          <a:bodyPr wrap="square" lIns="0" tIns="0" rIns="0" bIns="0" anchor="ctr">
             <a:spAutoFit/>
           </a:bodyPr>
           <a:lstStyle/>
@@ -7776,7 +7786,7 @@
           <a:noFill/>
         </p:spPr>
         <p:txBody>
-          <a:bodyPr wrap="square" lIns="0" rIns="0" tIns="0" bIns="0" anchor="ctr">
+          <a:bodyPr wrap="square" lIns="0" tIns="0" rIns="0" bIns="0" anchor="ctr">
             <a:spAutoFit/>
           </a:bodyPr>
           <a:lstStyle/>
@@ -7815,7 +7825,7 @@
           <a:noFill/>
         </p:spPr>
         <p:txBody>
-          <a:bodyPr wrap="square" lIns="0" rIns="0" tIns="0" bIns="0" anchor="t">
+          <a:bodyPr wrap="square" lIns="0" tIns="0" rIns="0" bIns="0" anchor="t">
             <a:spAutoFit/>
           </a:bodyPr>
           <a:lstStyle/>
@@ -7875,7 +7885,9 @@
         <p:txBody>
           <a:bodyPr rtlCol="0" anchor="ctr"/>
           <a:lstStyle/>
-          <a:p/>
+          <a:p>
+            <a:endParaRPr/>
+          </a:p>
         </p:txBody>
       </p:sp>
       <p:sp>
@@ -7895,7 +7907,7 @@
           <a:noFill/>
         </p:spPr>
         <p:txBody>
-          <a:bodyPr wrap="square" lIns="0" rIns="0" tIns="0" bIns="0" anchor="ctr">
+          <a:bodyPr wrap="square" lIns="0" tIns="0" rIns="0" bIns="0" anchor="ctr">
             <a:spAutoFit/>
           </a:bodyPr>
           <a:lstStyle/>
@@ -7934,7 +7946,7 @@
           <a:noFill/>
         </p:spPr>
         <p:txBody>
-          <a:bodyPr wrap="square" lIns="0" rIns="0" tIns="0" bIns="0" anchor="t">
+          <a:bodyPr wrap="square" lIns="0" tIns="0" rIns="0" bIns="0" anchor="t">
             <a:spAutoFit/>
           </a:bodyPr>
           <a:lstStyle/>
@@ -7994,7 +8006,9 @@
         <p:txBody>
           <a:bodyPr rtlCol="0" anchor="ctr"/>
           <a:lstStyle/>
-          <a:p/>
+          <a:p>
+            <a:endParaRPr/>
+          </a:p>
         </p:txBody>
       </p:sp>
       <p:sp>
@@ -8014,7 +8028,7 @@
           <a:noFill/>
         </p:spPr>
         <p:txBody>
-          <a:bodyPr wrap="square" lIns="0" rIns="0" tIns="0" bIns="0" anchor="ctr">
+          <a:bodyPr wrap="square" lIns="0" tIns="0" rIns="0" bIns="0" anchor="ctr">
             <a:spAutoFit/>
           </a:bodyPr>
           <a:lstStyle/>
@@ -8053,7 +8067,7 @@
           <a:noFill/>
         </p:spPr>
         <p:txBody>
-          <a:bodyPr wrap="square" lIns="0" rIns="0" tIns="0" bIns="0" anchor="t">
+          <a:bodyPr wrap="square" lIns="0" tIns="0" rIns="0" bIns="0" anchor="t">
             <a:spAutoFit/>
           </a:bodyPr>
           <a:lstStyle/>
@@ -8113,7 +8127,9 @@
         <p:txBody>
           <a:bodyPr rtlCol="0" anchor="ctr"/>
           <a:lstStyle/>
-          <a:p/>
+          <a:p>
+            <a:endParaRPr/>
+          </a:p>
         </p:txBody>
       </p:sp>
       <p:sp>
@@ -8133,7 +8149,7 @@
           <a:noFill/>
         </p:spPr>
         <p:txBody>
-          <a:bodyPr wrap="square" lIns="0" rIns="0" tIns="0" bIns="0" anchor="ctr">
+          <a:bodyPr wrap="square" lIns="0" tIns="0" rIns="0" bIns="0" anchor="ctr">
             <a:spAutoFit/>
           </a:bodyPr>
           <a:lstStyle/>
@@ -8172,7 +8188,7 @@
           <a:noFill/>
         </p:spPr>
         <p:txBody>
-          <a:bodyPr wrap="square" lIns="0" rIns="0" tIns="0" bIns="0" anchor="t">
+          <a:bodyPr wrap="square" lIns="0" tIns="0" rIns="0" bIns="0" anchor="t">
             <a:spAutoFit/>
           </a:bodyPr>
           <a:lstStyle/>
@@ -8232,7 +8248,9 @@
         <p:txBody>
           <a:bodyPr rtlCol="0" anchor="ctr"/>
           <a:lstStyle/>
-          <a:p/>
+          <a:p>
+            <a:endParaRPr/>
+          </a:p>
         </p:txBody>
       </p:sp>
     </p:spTree>
@@ -9667,7 +9685,9 @@
         <p:txBody>
           <a:bodyPr rtlCol="0" anchor="ctr"/>
           <a:lstStyle/>
-          <a:p/>
+          <a:p>
+            <a:endParaRPr/>
+          </a:p>
         </p:txBody>
       </p:sp>
       <p:sp>
@@ -9708,7 +9728,9 @@
         <p:txBody>
           <a:bodyPr rtlCol="0" anchor="ctr"/>
           <a:lstStyle/>
-          <a:p/>
+          <a:p>
+            <a:endParaRPr/>
+          </a:p>
         </p:txBody>
       </p:sp>
       <p:sp>
@@ -9728,7 +9750,7 @@
           <a:noFill/>
         </p:spPr>
         <p:txBody>
-          <a:bodyPr wrap="square" lIns="0" rIns="0" tIns="0" bIns="0" anchor="ctr">
+          <a:bodyPr wrap="square" lIns="0" tIns="0" rIns="0" bIns="0" anchor="ctr">
             <a:spAutoFit/>
           </a:bodyPr>
           <a:lstStyle/>
@@ -9767,7 +9789,7 @@
           <a:noFill/>
         </p:spPr>
         <p:txBody>
-          <a:bodyPr wrap="square" lIns="0" rIns="0" tIns="0" bIns="0" anchor="t">
+          <a:bodyPr wrap="square" lIns="0" tIns="0" rIns="0" bIns="0" anchor="t">
             <a:spAutoFit/>
           </a:bodyPr>
           <a:lstStyle/>
@@ -9806,7 +9828,7 @@
           <a:noFill/>
         </p:spPr>
         <p:txBody>
-          <a:bodyPr wrap="square" lIns="0" rIns="0" tIns="0" bIns="0" anchor="t">
+          <a:bodyPr wrap="square" lIns="0" tIns="0" rIns="0" bIns="0" anchor="t">
             <a:spAutoFit/>
           </a:bodyPr>
           <a:lstStyle/>
@@ -9866,7 +9888,9 @@
         <p:txBody>
           <a:bodyPr rtlCol="0" anchor="ctr"/>
           <a:lstStyle/>
-          <a:p/>
+          <a:p>
+            <a:endParaRPr/>
+          </a:p>
         </p:txBody>
       </p:sp>
       <p:sp>
@@ -9886,7 +9910,7 @@
           <a:noFill/>
         </p:spPr>
         <p:txBody>
-          <a:bodyPr wrap="square" lIns="0" rIns="0" tIns="0" bIns="0" anchor="t">
+          <a:bodyPr wrap="square" lIns="0" tIns="0" rIns="0" bIns="0" anchor="t">
             <a:spAutoFit/>
           </a:bodyPr>
           <a:lstStyle/>
@@ -9925,7 +9949,7 @@
           <a:noFill/>
         </p:spPr>
         <p:txBody>
-          <a:bodyPr wrap="square" lIns="0" rIns="0" tIns="0" bIns="0" anchor="t">
+          <a:bodyPr wrap="square" lIns="0" tIns="0" rIns="0" bIns="0" anchor="t">
             <a:spAutoFit/>
           </a:bodyPr>
           <a:lstStyle/>
@@ -9985,7 +10009,9 @@
         <p:txBody>
           <a:bodyPr rtlCol="0" anchor="ctr"/>
           <a:lstStyle/>
-          <a:p/>
+          <a:p>
+            <a:endParaRPr/>
+          </a:p>
         </p:txBody>
       </p:sp>
       <p:sp>
@@ -10005,7 +10031,7 @@
           <a:noFill/>
         </p:spPr>
         <p:txBody>
-          <a:bodyPr wrap="square" lIns="0" rIns="0" tIns="0" bIns="0" anchor="t">
+          <a:bodyPr wrap="square" lIns="0" tIns="0" rIns="0" bIns="0" anchor="t">
             <a:spAutoFit/>
           </a:bodyPr>
           <a:lstStyle/>
@@ -10044,7 +10070,7 @@
           <a:noFill/>
         </p:spPr>
         <p:txBody>
-          <a:bodyPr wrap="square" lIns="0" rIns="0" tIns="0" bIns="0" anchor="t">
+          <a:bodyPr wrap="square" lIns="0" tIns="0" rIns="0" bIns="0" anchor="t">
             <a:spAutoFit/>
           </a:bodyPr>
           <a:lstStyle/>
@@ -10083,7 +10109,7 @@
           <a:noFill/>
         </p:spPr>
         <p:txBody>
-          <a:bodyPr wrap="square" lIns="0" rIns="0" tIns="0" bIns="0" anchor="t">
+          <a:bodyPr wrap="square" lIns="0" tIns="0" rIns="0" bIns="0" anchor="t">
             <a:spAutoFit/>
           </a:bodyPr>
           <a:lstStyle/>
@@ -10143,7 +10169,9 @@
         <p:txBody>
           <a:bodyPr rtlCol="0" anchor="ctr"/>
           <a:lstStyle/>
-          <a:p/>
+          <a:p>
+            <a:endParaRPr/>
+          </a:p>
         </p:txBody>
       </p:sp>
     </p:spTree>
@@ -10570,7 +10598,9 @@
         <p:txBody>
           <a:bodyPr rtlCol="0" anchor="ctr"/>
           <a:lstStyle/>
-          <a:p/>
+          <a:p>
+            <a:endParaRPr/>
+          </a:p>
         </p:txBody>
       </p:sp>
       <p:sp>
@@ -10611,7 +10641,9 @@
         <p:txBody>
           <a:bodyPr rtlCol="0" anchor="ctr"/>
           <a:lstStyle/>
-          <a:p/>
+          <a:p>
+            <a:endParaRPr/>
+          </a:p>
         </p:txBody>
       </p:sp>
       <p:sp>
@@ -10652,7 +10684,9 @@
         <p:txBody>
           <a:bodyPr rtlCol="0" anchor="ctr"/>
           <a:lstStyle/>
-          <a:p/>
+          <a:p>
+            <a:endParaRPr/>
+          </a:p>
         </p:txBody>
       </p:sp>
       <p:sp>
@@ -10693,7 +10727,9 @@
         <p:txBody>
           <a:bodyPr rtlCol="0" anchor="ctr"/>
           <a:lstStyle/>
-          <a:p/>
+          <a:p>
+            <a:endParaRPr/>
+          </a:p>
         </p:txBody>
       </p:sp>
       <p:pic>
@@ -10760,7 +10796,9 @@
         <p:txBody>
           <a:bodyPr rtlCol="0" anchor="ctr"/>
           <a:lstStyle/>
-          <a:p/>
+          <a:p>
+            <a:endParaRPr/>
+          </a:p>
         </p:txBody>
       </p:sp>
       <p:sp>
@@ -10780,7 +10818,7 @@
           <a:noFill/>
         </p:spPr>
         <p:txBody>
-          <a:bodyPr wrap="square" lIns="0" rIns="0" tIns="0" bIns="0" anchor="ctr">
+          <a:bodyPr wrap="square" lIns="0" tIns="0" rIns="0" bIns="0" anchor="ctr">
             <a:spAutoFit/>
           </a:bodyPr>
           <a:lstStyle/>
@@ -10842,7 +10880,9 @@
         <p:txBody>
           <a:bodyPr rtlCol="0" anchor="ctr"/>
           <a:lstStyle/>
-          <a:p/>
+          <a:p>
+            <a:endParaRPr/>
+          </a:p>
         </p:txBody>
       </p:sp>
       <p:sp>
@@ -10862,7 +10902,7 @@
           <a:noFill/>
         </p:spPr>
         <p:txBody>
-          <a:bodyPr wrap="square" lIns="0" rIns="0" tIns="0" bIns="0" anchor="ctr">
+          <a:bodyPr wrap="square" lIns="0" tIns="0" rIns="0" bIns="0" anchor="ctr">
             <a:spAutoFit/>
           </a:bodyPr>
           <a:lstStyle/>
@@ -10924,7 +10964,9 @@
         <p:txBody>
           <a:bodyPr rtlCol="0" anchor="ctr"/>
           <a:lstStyle/>
-          <a:p/>
+          <a:p>
+            <a:endParaRPr/>
+          </a:p>
         </p:txBody>
       </p:sp>
       <p:sp>
@@ -10944,7 +10986,7 @@
           <a:noFill/>
         </p:spPr>
         <p:txBody>
-          <a:bodyPr wrap="square" lIns="0" rIns="0" tIns="0" bIns="0" anchor="ctr">
+          <a:bodyPr wrap="square" lIns="0" tIns="0" rIns="0" bIns="0" anchor="ctr">
             <a:spAutoFit/>
           </a:bodyPr>
           <a:lstStyle/>
@@ -11006,7 +11048,9 @@
         <p:txBody>
           <a:bodyPr rtlCol="0" anchor="ctr"/>
           <a:lstStyle/>
-          <a:p/>
+          <a:p>
+            <a:endParaRPr/>
+          </a:p>
         </p:txBody>
       </p:sp>
       <p:sp>
@@ -11026,7 +11070,7 @@
           <a:noFill/>
         </p:spPr>
         <p:txBody>
-          <a:bodyPr wrap="square" lIns="0" rIns="0" tIns="0" bIns="0" anchor="ctr">
+          <a:bodyPr wrap="square" lIns="0" tIns="0" rIns="0" bIns="0" anchor="ctr">
             <a:spAutoFit/>
           </a:bodyPr>
           <a:lstStyle/>
@@ -11097,7 +11141,9 @@
         <p:txBody>
           <a:bodyPr rtlCol="0" anchor="ctr"/>
           <a:lstStyle/>
-          <a:p/>
+          <a:p>
+            <a:endParaRPr/>
+          </a:p>
         </p:txBody>
       </p:sp>
       <p:sp>
@@ -11140,7 +11186,9 @@
         <p:txBody>
           <a:bodyPr rtlCol="0" anchor="ctr"/>
           <a:lstStyle/>
-          <a:p/>
+          <a:p>
+            <a:endParaRPr/>
+          </a:p>
         </p:txBody>
       </p:sp>
       <p:sp>
@@ -11160,7 +11208,7 @@
           <a:noFill/>
         </p:spPr>
         <p:txBody>
-          <a:bodyPr wrap="square" lIns="0" rIns="0" tIns="0" bIns="0" anchor="ctr">
+          <a:bodyPr wrap="square" lIns="0" tIns="0" rIns="0" bIns="0" anchor="ctr">
             <a:spAutoFit/>
           </a:bodyPr>
           <a:lstStyle/>
@@ -11199,7 +11247,7 @@
           <a:noFill/>
         </p:spPr>
         <p:txBody>
-          <a:bodyPr wrap="square" lIns="0" rIns="0" tIns="0" bIns="0" anchor="ctr">
+          <a:bodyPr wrap="square" lIns="0" tIns="0" rIns="0" bIns="0" anchor="ctr">
             <a:spAutoFit/>
           </a:bodyPr>
           <a:lstStyle/>
@@ -11286,7 +11334,9 @@
         <p:txBody>
           <a:bodyPr rtlCol="0" anchor="ctr"/>
           <a:lstStyle/>
-          <a:p/>
+          <a:p>
+            <a:endParaRPr/>
+          </a:p>
         </p:txBody>
       </p:sp>
       <p:sp>
@@ -11329,7 +11379,9 @@
         <p:txBody>
           <a:bodyPr rtlCol="0" anchor="ctr"/>
           <a:lstStyle/>
-          <a:p/>
+          <a:p>
+            <a:endParaRPr/>
+          </a:p>
         </p:txBody>
       </p:sp>
       <p:sp>
@@ -11349,7 +11401,7 @@
           <a:noFill/>
         </p:spPr>
         <p:txBody>
-          <a:bodyPr wrap="square" lIns="0" rIns="0" tIns="0" bIns="0" anchor="ctr">
+          <a:bodyPr wrap="square" lIns="0" tIns="0" rIns="0" bIns="0" anchor="ctr">
             <a:spAutoFit/>
           </a:bodyPr>
           <a:lstStyle/>
@@ -11388,7 +11440,7 @@
           <a:noFill/>
         </p:spPr>
         <p:txBody>
-          <a:bodyPr wrap="square" lIns="0" rIns="0" tIns="0" bIns="0" anchor="ctr">
+          <a:bodyPr wrap="square" lIns="0" tIns="0" rIns="0" bIns="0" anchor="ctr">
             <a:spAutoFit/>
           </a:bodyPr>
           <a:lstStyle/>
@@ -11475,7 +11527,9 @@
         <p:txBody>
           <a:bodyPr rtlCol="0" anchor="ctr"/>
           <a:lstStyle/>
-          <a:p/>
+          <a:p>
+            <a:endParaRPr/>
+          </a:p>
         </p:txBody>
       </p:sp>
       <p:sp>
@@ -11518,7 +11572,9 @@
         <p:txBody>
           <a:bodyPr rtlCol="0" anchor="ctr"/>
           <a:lstStyle/>
-          <a:p/>
+          <a:p>
+            <a:endParaRPr/>
+          </a:p>
         </p:txBody>
       </p:sp>
       <p:sp>
@@ -11538,7 +11594,7 @@
           <a:noFill/>
         </p:spPr>
         <p:txBody>
-          <a:bodyPr wrap="square" lIns="0" rIns="0" tIns="0" bIns="0" anchor="ctr">
+          <a:bodyPr wrap="square" lIns="0" tIns="0" rIns="0" bIns="0" anchor="ctr">
             <a:spAutoFit/>
           </a:bodyPr>
           <a:lstStyle/>
@@ -11577,7 +11633,7 @@
           <a:noFill/>
         </p:spPr>
         <p:txBody>
-          <a:bodyPr wrap="square" lIns="0" rIns="0" tIns="0" bIns="0" anchor="ctr">
+          <a:bodyPr wrap="square" lIns="0" tIns="0" rIns="0" bIns="0" anchor="ctr">
             <a:spAutoFit/>
           </a:bodyPr>
           <a:lstStyle/>
@@ -11664,7 +11720,9 @@
         <p:txBody>
           <a:bodyPr rtlCol="0" anchor="ctr"/>
           <a:lstStyle/>
-          <a:p/>
+          <a:p>
+            <a:endParaRPr/>
+          </a:p>
         </p:txBody>
       </p:sp>
       <p:sp>
@@ -11707,7 +11765,9 @@
         <p:txBody>
           <a:bodyPr rtlCol="0" anchor="ctr"/>
           <a:lstStyle/>
-          <a:p/>
+          <a:p>
+            <a:endParaRPr/>
+          </a:p>
         </p:txBody>
       </p:sp>
       <p:sp>
@@ -11727,7 +11787,7 @@
           <a:noFill/>
         </p:spPr>
         <p:txBody>
-          <a:bodyPr wrap="square" lIns="0" rIns="0" tIns="0" bIns="0" anchor="ctr">
+          <a:bodyPr wrap="square" lIns="0" tIns="0" rIns="0" bIns="0" anchor="ctr">
             <a:spAutoFit/>
           </a:bodyPr>
           <a:lstStyle/>
@@ -11766,7 +11826,7 @@
           <a:noFill/>
         </p:spPr>
         <p:txBody>
-          <a:bodyPr wrap="square" lIns="0" rIns="0" tIns="0" bIns="0" anchor="ctr">
+          <a:bodyPr wrap="square" lIns="0" tIns="0" rIns="0" bIns="0" anchor="ctr">
             <a:spAutoFit/>
           </a:bodyPr>
           <a:lstStyle/>
@@ -11851,7 +11911,9 @@
         <p:txBody>
           <a:bodyPr rtlCol="0" anchor="ctr"/>
           <a:lstStyle/>
-          <a:p/>
+          <a:p>
+            <a:endParaRPr/>
+          </a:p>
         </p:txBody>
       </p:sp>
       <p:sp>
@@ -11871,7 +11933,7 @@
           <a:noFill/>
         </p:spPr>
         <p:txBody>
-          <a:bodyPr wrap="square" lIns="0" rIns="0" tIns="0" bIns="0" anchor="ctr">
+          <a:bodyPr wrap="square" lIns="0" tIns="0" rIns="0" bIns="0" anchor="ctr">
             <a:spAutoFit/>
           </a:bodyPr>
           <a:lstStyle/>
@@ -11940,7 +12002,9 @@
         <p:txBody>
           <a:bodyPr rtlCol="0" anchor="ctr"/>
           <a:lstStyle/>
-          <a:p/>
+          <a:p>
+            <a:endParaRPr/>
+          </a:p>
         </p:txBody>
       </p:sp>
     </p:spTree>
@@ -12372,7 +12436,9 @@
         <p:txBody>
           <a:bodyPr rtlCol="0" anchor="ctr"/>
           <a:lstStyle/>
-          <a:p/>
+          <a:p>
+            <a:endParaRPr/>
+          </a:p>
         </p:txBody>
       </p:sp>
       <p:sp>
@@ -12413,7 +12479,9 @@
         <p:txBody>
           <a:bodyPr rtlCol="0" anchor="ctr"/>
           <a:lstStyle/>
-          <a:p/>
+          <a:p>
+            <a:endParaRPr/>
+          </a:p>
         </p:txBody>
       </p:sp>
       <p:sp>
@@ -12454,7 +12522,9 @@
         <p:txBody>
           <a:bodyPr rtlCol="0" anchor="ctr"/>
           <a:lstStyle/>
-          <a:p/>
+          <a:p>
+            <a:endParaRPr/>
+          </a:p>
         </p:txBody>
       </p:sp>
       <p:sp>
@@ -12495,7 +12565,9 @@
         <p:txBody>
           <a:bodyPr rtlCol="0" anchor="ctr"/>
           <a:lstStyle/>
-          <a:p/>
+          <a:p>
+            <a:endParaRPr/>
+          </a:p>
         </p:txBody>
       </p:sp>
       <p:sp>
@@ -12539,7 +12611,9 @@
         <p:txBody>
           <a:bodyPr rtlCol="0" anchor="ctr"/>
           <a:lstStyle/>
-          <a:p/>
+          <a:p>
+            <a:endParaRPr/>
+          </a:p>
         </p:txBody>
       </p:sp>
       <p:sp>
@@ -12559,7 +12633,7 @@
           <a:noFill/>
         </p:spPr>
         <p:txBody>
-          <a:bodyPr wrap="square" lIns="0" rIns="0" tIns="0" bIns="0" anchor="ctr">
+          <a:bodyPr wrap="square" lIns="0" tIns="0" rIns="0" bIns="0" anchor="ctr">
             <a:spAutoFit/>
           </a:bodyPr>
           <a:lstStyle/>
@@ -12570,7 +12644,7 @@
               </a:spcAft>
             </a:pPr>
             <a:r>
-              <a:rPr sz="1400" b="0">
+              <a:rPr sz="1400" b="0" dirty="0">
                 <a:solidFill>
                   <a:srgbClr val="5F6B7A"/>
                 </a:solidFill>
@@ -12586,13 +12660,31 @@
               </a:spcAft>
             </a:pPr>
             <a:r>
-              <a:rPr sz="1400" b="0">
+              <a:rPr sz="1400" b="0" dirty="0">
                 <a:solidFill>
                   <a:srgbClr val="5F6B7A"/>
                 </a:solidFill>
                 <a:latin typeface="Arial"/>
               </a:rPr>
-              <a:t>Save it as docs/store_manager_portal.png and rerun the build script</a:t>
+              <a:t>Save it as docs/</a:t>
+            </a:r>
+            <a:r>
+              <a:rPr sz="1400" b="0" dirty="0" err="1">
+                <a:solidFill>
+                  <a:srgbClr val="5F6B7A"/>
+                </a:solidFill>
+                <a:latin typeface="Arial"/>
+              </a:rPr>
+              <a:t>store_manager_portal.png</a:t>
+            </a:r>
+            <a:r>
+              <a:rPr sz="1400" b="0" dirty="0">
+                <a:solidFill>
+                  <a:srgbClr val="5F6B7A"/>
+                </a:solidFill>
+                <a:latin typeface="Arial"/>
+              </a:rPr>
+              <a:t> and rerun the build script</a:t>
             </a:r>
           </a:p>
         </p:txBody>
@@ -12637,7 +12729,9 @@
         <p:txBody>
           <a:bodyPr rtlCol="0" anchor="ctr"/>
           <a:lstStyle/>
-          <a:p/>
+          <a:p>
+            <a:endParaRPr/>
+          </a:p>
         </p:txBody>
       </p:sp>
       <p:sp>
@@ -12657,7 +12751,7 @@
           <a:noFill/>
         </p:spPr>
         <p:txBody>
-          <a:bodyPr wrap="square" lIns="0" rIns="0" tIns="0" bIns="0" anchor="ctr">
+          <a:bodyPr wrap="square" lIns="0" tIns="0" rIns="0" bIns="0" anchor="ctr">
             <a:spAutoFit/>
           </a:bodyPr>
           <a:lstStyle/>
@@ -12719,7 +12813,9 @@
         <p:txBody>
           <a:bodyPr rtlCol="0" anchor="ctr"/>
           <a:lstStyle/>
-          <a:p/>
+          <a:p>
+            <a:endParaRPr/>
+          </a:p>
         </p:txBody>
       </p:sp>
       <p:sp>
@@ -12739,7 +12835,7 @@
           <a:noFill/>
         </p:spPr>
         <p:txBody>
-          <a:bodyPr wrap="square" lIns="0" rIns="0" tIns="0" bIns="0" anchor="ctr">
+          <a:bodyPr wrap="square" lIns="0" tIns="0" rIns="0" bIns="0" anchor="ctr">
             <a:spAutoFit/>
           </a:bodyPr>
           <a:lstStyle/>
@@ -12801,7 +12897,9 @@
         <p:txBody>
           <a:bodyPr rtlCol="0" anchor="ctr"/>
           <a:lstStyle/>
-          <a:p/>
+          <a:p>
+            <a:endParaRPr/>
+          </a:p>
         </p:txBody>
       </p:sp>
       <p:sp>
@@ -12821,7 +12919,7 @@
           <a:noFill/>
         </p:spPr>
         <p:txBody>
-          <a:bodyPr wrap="square" lIns="0" rIns="0" tIns="0" bIns="0" anchor="ctr">
+          <a:bodyPr wrap="square" lIns="0" tIns="0" rIns="0" bIns="0" anchor="ctr">
             <a:spAutoFit/>
           </a:bodyPr>
           <a:lstStyle/>
@@ -12883,7 +12981,9 @@
         <p:txBody>
           <a:bodyPr rtlCol="0" anchor="ctr"/>
           <a:lstStyle/>
-          <a:p/>
+          <a:p>
+            <a:endParaRPr/>
+          </a:p>
         </p:txBody>
       </p:sp>
       <p:sp>
@@ -12903,7 +13003,7 @@
           <a:noFill/>
         </p:spPr>
         <p:txBody>
-          <a:bodyPr wrap="square" lIns="0" rIns="0" tIns="0" bIns="0" anchor="ctr">
+          <a:bodyPr wrap="square" lIns="0" tIns="0" rIns="0" bIns="0" anchor="ctr">
             <a:spAutoFit/>
           </a:bodyPr>
           <a:lstStyle/>
@@ -12974,7 +13074,9 @@
         <p:txBody>
           <a:bodyPr rtlCol="0" anchor="ctr"/>
           <a:lstStyle/>
-          <a:p/>
+          <a:p>
+            <a:endParaRPr/>
+          </a:p>
         </p:txBody>
       </p:sp>
       <p:sp>
@@ -13017,7 +13119,9 @@
         <p:txBody>
           <a:bodyPr rtlCol="0" anchor="ctr"/>
           <a:lstStyle/>
-          <a:p/>
+          <a:p>
+            <a:endParaRPr/>
+          </a:p>
         </p:txBody>
       </p:sp>
       <p:sp>
@@ -13037,7 +13141,7 @@
           <a:noFill/>
         </p:spPr>
         <p:txBody>
-          <a:bodyPr wrap="square" lIns="0" rIns="0" tIns="0" bIns="0" anchor="ctr">
+          <a:bodyPr wrap="square" lIns="0" tIns="0" rIns="0" bIns="0" anchor="ctr">
             <a:spAutoFit/>
           </a:bodyPr>
           <a:lstStyle/>
@@ -13076,7 +13180,7 @@
           <a:noFill/>
         </p:spPr>
         <p:txBody>
-          <a:bodyPr wrap="square" lIns="0" rIns="0" tIns="0" bIns="0" anchor="ctr">
+          <a:bodyPr wrap="square" lIns="0" tIns="0" rIns="0" bIns="0" anchor="ctr">
             <a:spAutoFit/>
           </a:bodyPr>
           <a:lstStyle/>
@@ -13163,7 +13267,9 @@
         <p:txBody>
           <a:bodyPr rtlCol="0" anchor="ctr"/>
           <a:lstStyle/>
-          <a:p/>
+          <a:p>
+            <a:endParaRPr/>
+          </a:p>
         </p:txBody>
       </p:sp>
       <p:sp>
@@ -13206,7 +13312,9 @@
         <p:txBody>
           <a:bodyPr rtlCol="0" anchor="ctr"/>
           <a:lstStyle/>
-          <a:p/>
+          <a:p>
+            <a:endParaRPr/>
+          </a:p>
         </p:txBody>
       </p:sp>
       <p:sp>
@@ -13226,7 +13334,7 @@
           <a:noFill/>
         </p:spPr>
         <p:txBody>
-          <a:bodyPr wrap="square" lIns="0" rIns="0" tIns="0" bIns="0" anchor="ctr">
+          <a:bodyPr wrap="square" lIns="0" tIns="0" rIns="0" bIns="0" anchor="ctr">
             <a:spAutoFit/>
           </a:bodyPr>
           <a:lstStyle/>
@@ -13265,7 +13373,7 @@
           <a:noFill/>
         </p:spPr>
         <p:txBody>
-          <a:bodyPr wrap="square" lIns="0" rIns="0" tIns="0" bIns="0" anchor="ctr">
+          <a:bodyPr wrap="square" lIns="0" tIns="0" rIns="0" bIns="0" anchor="ctr">
             <a:spAutoFit/>
           </a:bodyPr>
           <a:lstStyle/>
@@ -13352,7 +13460,9 @@
         <p:txBody>
           <a:bodyPr rtlCol="0" anchor="ctr"/>
           <a:lstStyle/>
-          <a:p/>
+          <a:p>
+            <a:endParaRPr/>
+          </a:p>
         </p:txBody>
       </p:sp>
       <p:sp>
@@ -13395,7 +13505,9 @@
         <p:txBody>
           <a:bodyPr rtlCol="0" anchor="ctr"/>
           <a:lstStyle/>
-          <a:p/>
+          <a:p>
+            <a:endParaRPr/>
+          </a:p>
         </p:txBody>
       </p:sp>
       <p:sp>
@@ -13415,7 +13527,7 @@
           <a:noFill/>
         </p:spPr>
         <p:txBody>
-          <a:bodyPr wrap="square" lIns="0" rIns="0" tIns="0" bIns="0" anchor="ctr">
+          <a:bodyPr wrap="square" lIns="0" tIns="0" rIns="0" bIns="0" anchor="ctr">
             <a:spAutoFit/>
           </a:bodyPr>
           <a:lstStyle/>
@@ -13454,7 +13566,7 @@
           <a:noFill/>
         </p:spPr>
         <p:txBody>
-          <a:bodyPr wrap="square" lIns="0" rIns="0" tIns="0" bIns="0" anchor="ctr">
+          <a:bodyPr wrap="square" lIns="0" tIns="0" rIns="0" bIns="0" anchor="ctr">
             <a:spAutoFit/>
           </a:bodyPr>
           <a:lstStyle/>
@@ -13541,7 +13653,9 @@
         <p:txBody>
           <a:bodyPr rtlCol="0" anchor="ctr"/>
           <a:lstStyle/>
-          <a:p/>
+          <a:p>
+            <a:endParaRPr/>
+          </a:p>
         </p:txBody>
       </p:sp>
       <p:sp>
@@ -13584,7 +13698,9 @@
         <p:txBody>
           <a:bodyPr rtlCol="0" anchor="ctr"/>
           <a:lstStyle/>
-          <a:p/>
+          <a:p>
+            <a:endParaRPr/>
+          </a:p>
         </p:txBody>
       </p:sp>
       <p:sp>
@@ -13604,7 +13720,7 @@
           <a:noFill/>
         </p:spPr>
         <p:txBody>
-          <a:bodyPr wrap="square" lIns="0" rIns="0" tIns="0" bIns="0" anchor="ctr">
+          <a:bodyPr wrap="square" lIns="0" tIns="0" rIns="0" bIns="0" anchor="ctr">
             <a:spAutoFit/>
           </a:bodyPr>
           <a:lstStyle/>
@@ -13643,7 +13759,7 @@
           <a:noFill/>
         </p:spPr>
         <p:txBody>
-          <a:bodyPr wrap="square" lIns="0" rIns="0" tIns="0" bIns="0" anchor="ctr">
+          <a:bodyPr wrap="square" lIns="0" tIns="0" rIns="0" bIns="0" anchor="ctr">
             <a:spAutoFit/>
           </a:bodyPr>
           <a:lstStyle/>
@@ -13728,7 +13844,9 @@
         <p:txBody>
           <a:bodyPr rtlCol="0" anchor="ctr"/>
           <a:lstStyle/>
-          <a:p/>
+          <a:p>
+            <a:endParaRPr/>
+          </a:p>
         </p:txBody>
       </p:sp>
       <p:sp>
@@ -13748,7 +13866,7 @@
           <a:noFill/>
         </p:spPr>
         <p:txBody>
-          <a:bodyPr wrap="square" lIns="0" rIns="0" tIns="0" bIns="0" anchor="ctr">
+          <a:bodyPr wrap="square" lIns="0" tIns="0" rIns="0" bIns="0" anchor="ctr">
             <a:spAutoFit/>
           </a:bodyPr>
           <a:lstStyle/>
@@ -13817,9 +13935,41 @@
         <p:txBody>
           <a:bodyPr rtlCol="0" anchor="ctr"/>
           <a:lstStyle/>
-          <a:p/>
-        </p:txBody>
-      </p:sp>
+          <a:p>
+            <a:endParaRPr/>
+          </a:p>
+        </p:txBody>
+      </p:sp>
+      <p:pic>
+        <p:nvPicPr>
+          <p:cNvPr id="2" name="Picture 1">
+            <a:extLst>
+              <a:ext uri="{FF2B5EF4-FFF2-40B4-BE49-F238E27FC236}">
+                <a16:creationId xmlns:a16="http://schemas.microsoft.com/office/drawing/2014/main" id="{4370A529-000A-89A9-3AF0-A7DEBA71CFEC}"/>
+              </a:ext>
+            </a:extLst>
+          </p:cNvPr>
+          <p:cNvPicPr>
+            <a:picLocks noChangeAspect="1"/>
+          </p:cNvPicPr>
+          <p:nvPr/>
+        </p:nvPicPr>
+        <p:blipFill>
+          <a:blip r:embed="rId4"/>
+          <a:stretch>
+            <a:fillRect/>
+          </a:stretch>
+        </p:blipFill>
+        <p:spPr>
+          <a:xfrm>
+            <a:off x="320040" y="1353312"/>
+            <a:ext cx="6371034" cy="3909392"/>
+          </a:xfrm>
+          <a:prstGeom prst="rect">
+            <a:avLst/>
+          </a:prstGeom>
+        </p:spPr>
+      </p:pic>
     </p:spTree>
     <p:extLst>
       <p:ext uri="{BB962C8B-B14F-4D97-AF65-F5344CB8AC3E}">
@@ -16146,7 +16296,9 @@
         <p:txBody>
           <a:bodyPr rtlCol="0" anchor="ctr"/>
           <a:lstStyle/>
-          <a:p/>
+          <a:p>
+            <a:endParaRPr/>
+          </a:p>
         </p:txBody>
       </p:sp>
       <p:sp>
@@ -16166,7 +16318,7 @@
           <a:noFill/>
         </p:spPr>
         <p:txBody>
-          <a:bodyPr wrap="square" lIns="0" rIns="0" tIns="0" bIns="0" anchor="ctr">
+          <a:bodyPr wrap="square" lIns="0" tIns="0" rIns="0" bIns="0" anchor="ctr">
             <a:spAutoFit/>
           </a:bodyPr>
           <a:lstStyle/>
@@ -16205,7 +16357,7 @@
           <a:noFill/>
         </p:spPr>
         <p:txBody>
-          <a:bodyPr wrap="square" lIns="0" rIns="0" tIns="0" bIns="0" anchor="ctr">
+          <a:bodyPr wrap="square" lIns="0" tIns="0" rIns="0" bIns="0" anchor="ctr">
             <a:spAutoFit/>
           </a:bodyPr>
           <a:lstStyle/>
@@ -16244,7 +16396,7 @@
           <a:noFill/>
         </p:spPr>
         <p:txBody>
-          <a:bodyPr wrap="square" lIns="0" rIns="0" tIns="0" bIns="0" anchor="t">
+          <a:bodyPr wrap="square" lIns="0" tIns="0" rIns="0" bIns="0" anchor="t">
             <a:spAutoFit/>
           </a:bodyPr>
           <a:lstStyle/>
@@ -16304,7 +16456,9 @@
         <p:txBody>
           <a:bodyPr rtlCol="0" anchor="ctr"/>
           <a:lstStyle/>
-          <a:p/>
+          <a:p>
+            <a:endParaRPr/>
+          </a:p>
         </p:txBody>
       </p:sp>
       <p:sp>
@@ -16324,7 +16478,7 @@
           <a:noFill/>
         </p:spPr>
         <p:txBody>
-          <a:bodyPr wrap="square" lIns="0" rIns="0" tIns="0" bIns="0" anchor="ctr">
+          <a:bodyPr wrap="square" lIns="0" tIns="0" rIns="0" bIns="0" anchor="ctr">
             <a:spAutoFit/>
           </a:bodyPr>
           <a:lstStyle/>
@@ -16363,7 +16517,7 @@
           <a:noFill/>
         </p:spPr>
         <p:txBody>
-          <a:bodyPr wrap="square" lIns="0" rIns="0" tIns="0" bIns="0" anchor="t">
+          <a:bodyPr wrap="square" lIns="0" tIns="0" rIns="0" bIns="0" anchor="t">
             <a:spAutoFit/>
           </a:bodyPr>
           <a:lstStyle/>
@@ -16423,7 +16577,9 @@
         <p:txBody>
           <a:bodyPr rtlCol="0" anchor="ctr"/>
           <a:lstStyle/>
-          <a:p/>
+          <a:p>
+            <a:endParaRPr/>
+          </a:p>
         </p:txBody>
       </p:sp>
       <p:sp>
@@ -16443,7 +16599,7 @@
           <a:noFill/>
         </p:spPr>
         <p:txBody>
-          <a:bodyPr wrap="square" lIns="0" rIns="0" tIns="0" bIns="0" anchor="ctr">
+          <a:bodyPr wrap="square" lIns="0" tIns="0" rIns="0" bIns="0" anchor="ctr">
             <a:spAutoFit/>
           </a:bodyPr>
           <a:lstStyle/>
@@ -16482,7 +16638,7 @@
           <a:noFill/>
         </p:spPr>
         <p:txBody>
-          <a:bodyPr wrap="square" lIns="0" rIns="0" tIns="0" bIns="0" anchor="t">
+          <a:bodyPr wrap="square" lIns="0" tIns="0" rIns="0" bIns="0" anchor="t">
             <a:spAutoFit/>
           </a:bodyPr>
           <a:lstStyle/>
@@ -16542,7 +16698,9 @@
         <p:txBody>
           <a:bodyPr rtlCol="0" anchor="ctr"/>
           <a:lstStyle/>
-          <a:p/>
+          <a:p>
+            <a:endParaRPr/>
+          </a:p>
         </p:txBody>
       </p:sp>
     </p:spTree>
@@ -18880,7 +19038,9 @@
         <p:txBody>
           <a:bodyPr rtlCol="0" anchor="ctr"/>
           <a:lstStyle/>
-          <a:p/>
+          <a:p>
+            <a:endParaRPr/>
+          </a:p>
         </p:txBody>
       </p:sp>
     </p:spTree>
@@ -19943,7 +20103,9 @@
         <p:txBody>
           <a:bodyPr rtlCol="0" anchor="ctr"/>
           <a:lstStyle/>
-          <a:p/>
+          <a:p>
+            <a:endParaRPr/>
+          </a:p>
         </p:txBody>
       </p:sp>
     </p:spTree>
@@ -20876,7 +21038,9 @@
         <p:txBody>
           <a:bodyPr rtlCol="0" anchor="ctr"/>
           <a:lstStyle/>
-          <a:p/>
+          <a:p>
+            <a:endParaRPr/>
+          </a:p>
         </p:txBody>
       </p:sp>
     </p:spTree>
@@ -23417,7 +23581,9 @@
         <p:txBody>
           <a:bodyPr rtlCol="0" anchor="ctr"/>
           <a:lstStyle/>
-          <a:p/>
+          <a:p>
+            <a:endParaRPr/>
+          </a:p>
         </p:txBody>
       </p:sp>
       <p:sp>
@@ -23437,7 +23603,7 @@
           <a:noFill/>
         </p:spPr>
         <p:txBody>
-          <a:bodyPr wrap="square" lIns="0" rIns="0" tIns="0" bIns="0" anchor="ctr">
+          <a:bodyPr wrap="square" lIns="0" tIns="0" rIns="0" bIns="0" anchor="ctr">
             <a:spAutoFit/>
           </a:bodyPr>
           <a:lstStyle/>
@@ -23476,7 +23642,7 @@
           <a:noFill/>
         </p:spPr>
         <p:txBody>
-          <a:bodyPr wrap="square" lIns="0" rIns="0" tIns="0" bIns="0" anchor="ctr">
+          <a:bodyPr wrap="square" lIns="0" tIns="0" rIns="0" bIns="0" anchor="ctr">
             <a:spAutoFit/>
           </a:bodyPr>
           <a:lstStyle/>
@@ -23515,7 +23681,7 @@
           <a:noFill/>
         </p:spPr>
         <p:txBody>
-          <a:bodyPr wrap="square" lIns="0" rIns="0" tIns="0" bIns="0" anchor="t">
+          <a:bodyPr wrap="square" lIns="0" tIns="0" rIns="0" bIns="0" anchor="t">
             <a:spAutoFit/>
           </a:bodyPr>
           <a:lstStyle/>
@@ -23575,7 +23741,9 @@
         <p:txBody>
           <a:bodyPr rtlCol="0" anchor="ctr"/>
           <a:lstStyle/>
-          <a:p/>
+          <a:p>
+            <a:endParaRPr/>
+          </a:p>
         </p:txBody>
       </p:sp>
       <p:sp>
@@ -23595,7 +23763,7 @@
           <a:noFill/>
         </p:spPr>
         <p:txBody>
-          <a:bodyPr wrap="square" lIns="0" rIns="0" tIns="0" bIns="0" anchor="ctr">
+          <a:bodyPr wrap="square" lIns="0" tIns="0" rIns="0" bIns="0" anchor="ctr">
             <a:spAutoFit/>
           </a:bodyPr>
           <a:lstStyle/>
@@ -23634,7 +23802,7 @@
           <a:noFill/>
         </p:spPr>
         <p:txBody>
-          <a:bodyPr wrap="square" lIns="0" rIns="0" tIns="0" bIns="0" anchor="t">
+          <a:bodyPr wrap="square" lIns="0" tIns="0" rIns="0" bIns="0" anchor="t">
             <a:spAutoFit/>
           </a:bodyPr>
           <a:lstStyle/>
@@ -23694,7 +23862,9 @@
         <p:txBody>
           <a:bodyPr rtlCol="0" anchor="ctr"/>
           <a:lstStyle/>
-          <a:p/>
+          <a:p>
+            <a:endParaRPr/>
+          </a:p>
         </p:txBody>
       </p:sp>
       <p:sp>
@@ -23714,7 +23884,7 @@
           <a:noFill/>
         </p:spPr>
         <p:txBody>
-          <a:bodyPr wrap="square" lIns="0" rIns="0" tIns="0" bIns="0" anchor="ctr">
+          <a:bodyPr wrap="square" lIns="0" tIns="0" rIns="0" bIns="0" anchor="ctr">
             <a:spAutoFit/>
           </a:bodyPr>
           <a:lstStyle/>
@@ -23753,7 +23923,7 @@
           <a:noFill/>
         </p:spPr>
         <p:txBody>
-          <a:bodyPr wrap="square" lIns="0" rIns="0" tIns="0" bIns="0" anchor="t">
+          <a:bodyPr wrap="square" lIns="0" tIns="0" rIns="0" bIns="0" anchor="t">
             <a:spAutoFit/>
           </a:bodyPr>
           <a:lstStyle/>
@@ -23813,7 +23983,9 @@
         <p:txBody>
           <a:bodyPr rtlCol="0" anchor="ctr"/>
           <a:lstStyle/>
-          <a:p/>
+          <a:p>
+            <a:endParaRPr/>
+          </a:p>
         </p:txBody>
       </p:sp>
       <p:sp>
@@ -23833,7 +24005,7 @@
           <a:noFill/>
         </p:spPr>
         <p:txBody>
-          <a:bodyPr wrap="square" lIns="0" rIns="0" tIns="0" bIns="0" anchor="ctr">
+          <a:bodyPr wrap="square" lIns="0" tIns="0" rIns="0" bIns="0" anchor="ctr">
             <a:spAutoFit/>
           </a:bodyPr>
           <a:lstStyle/>
@@ -23872,7 +24044,7 @@
           <a:noFill/>
         </p:spPr>
         <p:txBody>
-          <a:bodyPr wrap="square" lIns="0" rIns="0" tIns="0" bIns="0" anchor="t">
+          <a:bodyPr wrap="square" lIns="0" tIns="0" rIns="0" bIns="0" anchor="t">
             <a:spAutoFit/>
           </a:bodyPr>
           <a:lstStyle/>
@@ -23932,7 +24104,9 @@
         <p:txBody>
           <a:bodyPr rtlCol="0" anchor="ctr"/>
           <a:lstStyle/>
-          <a:p/>
+          <a:p>
+            <a:endParaRPr/>
+          </a:p>
         </p:txBody>
       </p:sp>
     </p:spTree>
@@ -24700,7 +24874,9 @@
         <p:txBody>
           <a:bodyPr rtlCol="0" anchor="ctr"/>
           <a:lstStyle/>
-          <a:p/>
+          <a:p>
+            <a:endParaRPr/>
+          </a:p>
         </p:txBody>
       </p:sp>
     </p:spTree>
@@ -25187,7 +25363,9 @@
         <p:txBody>
           <a:bodyPr rtlCol="0" anchor="ctr"/>
           <a:lstStyle/>
-          <a:p/>
+          <a:p>
+            <a:endParaRPr/>
+          </a:p>
         </p:txBody>
       </p:sp>
     </p:spTree>
@@ -27219,7 +27397,9 @@
         <p:txBody>
           <a:bodyPr rtlCol="0" anchor="ctr"/>
           <a:lstStyle/>
-          <a:p/>
+          <a:p>
+            <a:endParaRPr/>
+          </a:p>
         </p:txBody>
       </p:sp>
     </p:spTree>
@@ -27595,7 +27775,9 @@
         <p:txBody>
           <a:bodyPr rtlCol="0" anchor="ctr"/>
           <a:lstStyle/>
-          <a:p/>
+          <a:p>
+            <a:endParaRPr/>
+          </a:p>
         </p:txBody>
       </p:sp>
     </p:spTree>
@@ -28698,7 +28880,9 @@
         <p:txBody>
           <a:bodyPr rtlCol="0" anchor="ctr"/>
           <a:lstStyle/>
-          <a:p/>
+          <a:p>
+            <a:endParaRPr/>
+          </a:p>
         </p:txBody>
       </p:sp>
     </p:spTree>
@@ -29603,7 +29787,9 @@
         <p:txBody>
           <a:bodyPr rtlCol="0" anchor="ctr"/>
           <a:lstStyle/>
-          <a:p/>
+          <a:p>
+            <a:endParaRPr/>
+          </a:p>
         </p:txBody>
       </p:sp>
     </p:spTree>
@@ -30477,7 +30663,9 @@
         <p:txBody>
           <a:bodyPr rtlCol="0" anchor="ctr"/>
           <a:lstStyle/>
-          <a:p/>
+          <a:p>
+            <a:endParaRPr/>
+          </a:p>
         </p:txBody>
       </p:sp>
     </p:spTree>

--- a/docs/TeamBlueBird_InventoryOptimisationAgent_Presentation_Premium.pptx
+++ b/docs/TeamBlueBird_InventoryOptimisationAgent_Presentation_Premium.pptx
@@ -12396,7 +12396,7 @@
         <p:spPr>
           <a:xfrm>
             <a:off x="548640" y="1463040"/>
-            <a:ext cx="6142434" cy="3794760"/>
+            <a:ext cx="7070651" cy="3794760"/>
           </a:xfrm>
           <a:prstGeom prst="roundRect">
             <a:avLst>
@@ -12570,28 +12570,51 @@
           </a:p>
         </p:txBody>
       </p:sp>
-      <p:sp>
-        <p:nvSpPr>
-          <p:cNvPr id="47" name="Rectangle 46"/>
+      <p:pic>
+        <p:nvPicPr>
+          <p:cNvPr id="76" name="Store Manager screenshot" descr="image.png"/>
+          <p:cNvPicPr>
+            <a:picLocks noChangeAspect="1"/>
+          </p:cNvPicPr>
+          <p:nvPr/>
+        </p:nvPicPr>
+        <p:blipFill>
+          <a:blip r:embed="rId4"/>
+          <a:stretch>
+            <a:fillRect/>
+          </a:stretch>
+        </p:blipFill>
+        <p:spPr>
+          <a:xfrm>
+            <a:off x="548640" y="1737360"/>
+            <a:ext cx="7070651" cy="3520440"/>
+          </a:xfrm>
+          <a:prstGeom prst="rect">
+            <a:avLst/>
+          </a:prstGeom>
+        </p:spPr>
+      </p:pic>
+      <p:sp>
+        <p:nvSpPr>
+          <p:cNvPr id="49" name="Oval 48"/>
           <p:cNvSpPr/>
           <p:nvPr/>
         </p:nvSpPr>
         <p:spPr>
           <a:xfrm>
-            <a:off x="548640" y="1737360"/>
-            <a:ext cx="6142434" cy="3520440"/>
-          </a:xfrm>
-          <a:prstGeom prst="rect">
+            <a:off x="1578137" y="2304288"/>
+            <a:ext cx="274320" cy="274320"/>
+          </a:xfrm>
+          <a:prstGeom prst="ellipse">
             <a:avLst/>
           </a:prstGeom>
           <a:solidFill>
-            <a:srgbClr val="FFFFFF"/>
+            <a:srgbClr val="F2A900"/>
           </a:solidFill>
           <a:ln w="19050">
             <a:solidFill>
-              <a:srgbClr val="2E75B6"/>
+              <a:srgbClr val="FFFFFF"/>
             </a:solidFill>
-            <a:prstDash val="dash"/>
           </a:ln>
         </p:spPr>
         <p:style>
@@ -12618,14 +12641,14 @@
       </p:sp>
       <p:sp>
         <p:nvSpPr>
-          <p:cNvPr id="48" name="TextBox 47"/>
-          <p:cNvSpPr txBox="1"/>
-          <p:nvPr/>
-        </p:nvSpPr>
-        <p:spPr>
-          <a:xfrm>
-            <a:off x="548640" y="1737360"/>
-            <a:ext cx="6142434" cy="3520440"/>
+          <p:cNvPr id="50" name="TextBox 49"/>
+          <p:cNvSpPr txBox="1"/>
+          <p:nvPr/>
+        </p:nvSpPr>
+        <p:spPr>
+          <a:xfrm>
+            <a:off x="1578137" y="2304288"/>
+            <a:ext cx="274320" cy="274320"/>
           </a:xfrm>
           <a:prstGeom prst="rect">
             <a:avLst/>
@@ -12640,64 +12663,30 @@
           <a:p>
             <a:pPr algn="ctr">
               <a:spcAft>
-                <a:spcPts val="600"/>
+                <a:spcPts val="0"/>
               </a:spcAft>
             </a:pPr>
             <a:r>
-              <a:rPr sz="1400" b="0" dirty="0">
-                <a:solidFill>
-                  <a:srgbClr val="5F6B7A"/>
+              <a:rPr sz="1100" b="1">
+                <a:solidFill>
+                  <a:srgbClr val="1F3864"/>
                 </a:solidFill>
                 <a:latin typeface="Arial"/>
               </a:rPr>
-              <a:t>Store Manager screenshot</a:t>
-            </a:r>
-          </a:p>
-          <a:p>
-            <a:pPr algn="ctr">
-              <a:spcAft>
-                <a:spcPts val="600"/>
-              </a:spcAft>
-            </a:pPr>
-            <a:r>
-              <a:rPr sz="1400" b="0" dirty="0">
-                <a:solidFill>
-                  <a:srgbClr val="5F6B7A"/>
-                </a:solidFill>
-                <a:latin typeface="Arial"/>
-              </a:rPr>
-              <a:t>Save it as docs/</a:t>
-            </a:r>
-            <a:r>
-              <a:rPr sz="1400" b="0" dirty="0" err="1">
-                <a:solidFill>
-                  <a:srgbClr val="5F6B7A"/>
-                </a:solidFill>
-                <a:latin typeface="Arial"/>
-              </a:rPr>
-              <a:t>store_manager_portal.png</a:t>
-            </a:r>
-            <a:r>
-              <a:rPr sz="1400" b="0" dirty="0">
-                <a:solidFill>
-                  <a:srgbClr val="5F6B7A"/>
-                </a:solidFill>
-                <a:latin typeface="Arial"/>
-              </a:rPr>
-              <a:t> and rerun the build script</a:t>
-            </a:r>
-          </a:p>
-        </p:txBody>
-      </p:sp>
-      <p:sp>
-        <p:nvSpPr>
-          <p:cNvPr id="49" name="Oval 48"/>
+              <a:t>1</a:t>
+            </a:r>
+          </a:p>
+        </p:txBody>
+      </p:sp>
+      <p:sp>
+        <p:nvSpPr>
+          <p:cNvPr id="51" name="Oval 50"/>
           <p:cNvSpPr/>
           <p:nvPr/>
         </p:nvSpPr>
         <p:spPr>
           <a:xfrm>
-            <a:off x="1670678" y="2420462"/>
+            <a:off x="2532675" y="1811426"/>
             <a:ext cx="274320" cy="274320"/>
           </a:xfrm>
           <a:prstGeom prst="ellipse">
@@ -12736,13 +12725,13 @@
       </p:sp>
       <p:sp>
         <p:nvSpPr>
-          <p:cNvPr id="50" name="TextBox 49"/>
-          <p:cNvSpPr txBox="1"/>
-          <p:nvPr/>
-        </p:nvSpPr>
-        <p:spPr>
-          <a:xfrm>
-            <a:off x="1670678" y="2420462"/>
+          <p:cNvPr id="52" name="TextBox 51"/>
+          <p:cNvSpPr txBox="1"/>
+          <p:nvPr/>
+        </p:nvSpPr>
+        <p:spPr>
+          <a:xfrm>
+            <a:off x="2532675" y="1811426"/>
             <a:ext cx="274320" cy="274320"/>
           </a:xfrm>
           <a:prstGeom prst="rect">
@@ -12768,20 +12757,20 @@
                 </a:solidFill>
                 <a:latin typeface="Arial"/>
               </a:rPr>
-              <a:t>1</a:t>
-            </a:r>
-          </a:p>
-        </p:txBody>
-      </p:sp>
-      <p:sp>
-        <p:nvSpPr>
-          <p:cNvPr id="51" name="Oval 50"/>
+              <a:t>2</a:t>
+            </a:r>
+          </a:p>
+        </p:txBody>
+      </p:sp>
+      <p:sp>
+        <p:nvSpPr>
+          <p:cNvPr id="53" name="Oval 52"/>
           <p:cNvSpPr/>
           <p:nvPr/>
         </p:nvSpPr>
         <p:spPr>
           <a:xfrm>
-            <a:off x="2592044" y="1804385"/>
+            <a:off x="5672044" y="3311133"/>
             <a:ext cx="274320" cy="274320"/>
           </a:xfrm>
           <a:prstGeom prst="ellipse">
@@ -12820,13 +12809,13 @@
       </p:sp>
       <p:sp>
         <p:nvSpPr>
-          <p:cNvPr id="52" name="TextBox 51"/>
-          <p:cNvSpPr txBox="1"/>
-          <p:nvPr/>
-        </p:nvSpPr>
-        <p:spPr>
-          <a:xfrm>
-            <a:off x="2592044" y="1804385"/>
+          <p:cNvPr id="54" name="TextBox 53"/>
+          <p:cNvSpPr txBox="1"/>
+          <p:nvPr/>
+        </p:nvSpPr>
+        <p:spPr>
+          <a:xfrm>
+            <a:off x="5672044" y="3311133"/>
             <a:ext cx="274320" cy="274320"/>
           </a:xfrm>
           <a:prstGeom prst="rect">
@@ -12852,20 +12841,20 @@
                 </a:solidFill>
                 <a:latin typeface="Arial"/>
               </a:rPr>
-              <a:t>2</a:t>
-            </a:r>
-          </a:p>
-        </p:txBody>
-      </p:sp>
-      <p:sp>
-        <p:nvSpPr>
-          <p:cNvPr id="53" name="Oval 52"/>
+              <a:t>3</a:t>
+            </a:r>
+          </a:p>
+        </p:txBody>
+      </p:sp>
+      <p:sp>
+        <p:nvSpPr>
+          <p:cNvPr id="55" name="Oval 54"/>
           <p:cNvSpPr/>
           <p:nvPr/>
         </p:nvSpPr>
         <p:spPr>
           <a:xfrm>
-            <a:off x="5417563" y="3325215"/>
+            <a:off x="1627631" y="4909413"/>
             <a:ext cx="274320" cy="274320"/>
           </a:xfrm>
           <a:prstGeom prst="ellipse">
@@ -12904,13 +12893,13 @@
       </p:sp>
       <p:sp>
         <p:nvSpPr>
-          <p:cNvPr id="54" name="TextBox 53"/>
-          <p:cNvSpPr txBox="1"/>
-          <p:nvPr/>
-        </p:nvSpPr>
-        <p:spPr>
-          <a:xfrm>
-            <a:off x="5417563" y="3325215"/>
+          <p:cNvPr id="56" name="TextBox 55"/>
+          <p:cNvSpPr txBox="1"/>
+          <p:nvPr/>
+        </p:nvSpPr>
+        <p:spPr>
+          <a:xfrm>
+            <a:off x="1627631" y="4909413"/>
             <a:ext cx="274320" cy="274320"/>
           </a:xfrm>
           <a:prstGeom prst="rect">
@@ -12936,90 +12925,6 @@
                 </a:solidFill>
                 <a:latin typeface="Arial"/>
               </a:rPr>
-              <a:t>3</a:t>
-            </a:r>
-          </a:p>
-        </p:txBody>
-      </p:sp>
-      <p:sp>
-        <p:nvSpPr>
-          <p:cNvPr id="55" name="Oval 54"/>
-          <p:cNvSpPr/>
-          <p:nvPr/>
-        </p:nvSpPr>
-        <p:spPr>
-          <a:xfrm>
-            <a:off x="1639966" y="4944618"/>
-            <a:ext cx="274320" cy="274320"/>
-          </a:xfrm>
-          <a:prstGeom prst="ellipse">
-            <a:avLst/>
-          </a:prstGeom>
-          <a:solidFill>
-            <a:srgbClr val="F2A900"/>
-          </a:solidFill>
-          <a:ln w="19050">
-            <a:solidFill>
-              <a:srgbClr val="FFFFFF"/>
-            </a:solidFill>
-          </a:ln>
-        </p:spPr>
-        <p:style>
-          <a:lnRef idx="1">
-            <a:schemeClr val="accent1"/>
-          </a:lnRef>
-          <a:fillRef idx="3">
-            <a:schemeClr val="accent1"/>
-          </a:fillRef>
-          <a:effectRef idx="2">
-            <a:schemeClr val="accent1"/>
-          </a:effectRef>
-          <a:fontRef idx="minor">
-            <a:schemeClr val="lt1"/>
-          </a:fontRef>
-        </p:style>
-        <p:txBody>
-          <a:bodyPr rtlCol="0" anchor="ctr"/>
-          <a:lstStyle/>
-          <a:p>
-            <a:endParaRPr/>
-          </a:p>
-        </p:txBody>
-      </p:sp>
-      <p:sp>
-        <p:nvSpPr>
-          <p:cNvPr id="56" name="TextBox 55"/>
-          <p:cNvSpPr txBox="1"/>
-          <p:nvPr/>
-        </p:nvSpPr>
-        <p:spPr>
-          <a:xfrm>
-            <a:off x="1639966" y="4944618"/>
-            <a:ext cx="274320" cy="274320"/>
-          </a:xfrm>
-          <a:prstGeom prst="rect">
-            <a:avLst/>
-          </a:prstGeom>
-          <a:noFill/>
-        </p:spPr>
-        <p:txBody>
-          <a:bodyPr wrap="square" lIns="0" tIns="0" rIns="0" bIns="0" anchor="ctr">
-            <a:spAutoFit/>
-          </a:bodyPr>
-          <a:lstStyle/>
-          <a:p>
-            <a:pPr algn="ctr">
-              <a:spcAft>
-                <a:spcPts val="0"/>
-              </a:spcAft>
-            </a:pPr>
-            <a:r>
-              <a:rPr sz="1100" b="1">
-                <a:solidFill>
-                  <a:srgbClr val="1F3864"/>
-                </a:solidFill>
-                <a:latin typeface="Arial"/>
-              </a:rPr>
               <a:t>4</a:t>
             </a:r>
           </a:p>
@@ -13033,8 +12938,8 @@
         </p:nvSpPr>
         <p:spPr>
           <a:xfrm>
-            <a:off x="7011114" y="1463040"/>
-            <a:ext cx="4647486" cy="852678"/>
+            <a:off x="7939331" y="1463040"/>
+            <a:ext cx="3719269" cy="852678"/>
           </a:xfrm>
           <a:prstGeom prst="roundRect">
             <a:avLst>
@@ -13087,7 +12992,7 @@
         </p:nvSpPr>
         <p:spPr>
           <a:xfrm>
-            <a:off x="7175706" y="1733931"/>
+            <a:off x="8103923" y="1733931"/>
             <a:ext cx="310896" cy="310896"/>
           </a:xfrm>
           <a:prstGeom prst="ellipse">
@@ -13132,7 +13037,7 @@
         </p:nvSpPr>
         <p:spPr>
           <a:xfrm>
-            <a:off x="7175706" y="1733931"/>
+            <a:off x="8103923" y="1733931"/>
             <a:ext cx="310896" cy="310896"/>
           </a:xfrm>
           <a:prstGeom prst="rect">
@@ -13171,8 +13076,8 @@
         </p:nvSpPr>
         <p:spPr>
           <a:xfrm>
-            <a:off x="7651194" y="1554480"/>
-            <a:ext cx="3870246" cy="669798"/>
+            <a:off x="8579411" y="1554480"/>
+            <a:ext cx="2942029" cy="669798"/>
           </a:xfrm>
           <a:prstGeom prst="rect">
             <a:avLst/>
@@ -13226,8 +13131,8 @@
         </p:nvSpPr>
         <p:spPr>
           <a:xfrm>
-            <a:off x="7011114" y="2443734"/>
-            <a:ext cx="4647486" cy="852678"/>
+            <a:off x="7939331" y="2443734"/>
+            <a:ext cx="3719269" cy="852678"/>
           </a:xfrm>
           <a:prstGeom prst="roundRect">
             <a:avLst>
@@ -13280,7 +13185,7 @@
         </p:nvSpPr>
         <p:spPr>
           <a:xfrm>
-            <a:off x="7175706" y="2714625"/>
+            <a:off x="8103923" y="2714625"/>
             <a:ext cx="310896" cy="310896"/>
           </a:xfrm>
           <a:prstGeom prst="ellipse">
@@ -13325,7 +13230,7 @@
         </p:nvSpPr>
         <p:spPr>
           <a:xfrm>
-            <a:off x="7175706" y="2714625"/>
+            <a:off x="8103923" y="2714625"/>
             <a:ext cx="310896" cy="310896"/>
           </a:xfrm>
           <a:prstGeom prst="rect">
@@ -13364,8 +13269,8 @@
         </p:nvSpPr>
         <p:spPr>
           <a:xfrm>
-            <a:off x="7651194" y="2535174"/>
-            <a:ext cx="3870246" cy="669798"/>
+            <a:off x="8579411" y="2535174"/>
+            <a:ext cx="2942029" cy="669798"/>
           </a:xfrm>
           <a:prstGeom prst="rect">
             <a:avLst/>
@@ -13419,8 +13324,8 @@
         </p:nvSpPr>
         <p:spPr>
           <a:xfrm>
-            <a:off x="7011114" y="3424428"/>
-            <a:ext cx="4647486" cy="852678"/>
+            <a:off x="7939331" y="3424428"/>
+            <a:ext cx="3719269" cy="852678"/>
           </a:xfrm>
           <a:prstGeom prst="roundRect">
             <a:avLst>
@@ -13473,7 +13378,7 @@
         </p:nvSpPr>
         <p:spPr>
           <a:xfrm>
-            <a:off x="7175706" y="3695319"/>
+            <a:off x="8103923" y="3695319"/>
             <a:ext cx="310896" cy="310896"/>
           </a:xfrm>
           <a:prstGeom prst="ellipse">
@@ -13518,7 +13423,7 @@
         </p:nvSpPr>
         <p:spPr>
           <a:xfrm>
-            <a:off x="7175706" y="3695319"/>
+            <a:off x="8103923" y="3695319"/>
             <a:ext cx="310896" cy="310896"/>
           </a:xfrm>
           <a:prstGeom prst="rect">
@@ -13557,8 +13462,8 @@
         </p:nvSpPr>
         <p:spPr>
           <a:xfrm>
-            <a:off x="7651194" y="3515868"/>
-            <a:ext cx="3870246" cy="669798"/>
+            <a:off x="8579411" y="3515868"/>
+            <a:ext cx="2942029" cy="669798"/>
           </a:xfrm>
           <a:prstGeom prst="rect">
             <a:avLst/>
@@ -13612,8 +13517,8 @@
         </p:nvSpPr>
         <p:spPr>
           <a:xfrm>
-            <a:off x="7011114" y="4405122"/>
-            <a:ext cx="4647486" cy="852678"/>
+            <a:off x="7939331" y="4405122"/>
+            <a:ext cx="3719269" cy="852678"/>
           </a:xfrm>
           <a:prstGeom prst="roundRect">
             <a:avLst>
@@ -13666,7 +13571,7 @@
         </p:nvSpPr>
         <p:spPr>
           <a:xfrm>
-            <a:off x="7175706" y="4676013"/>
+            <a:off x="8103923" y="4676013"/>
             <a:ext cx="310896" cy="310896"/>
           </a:xfrm>
           <a:prstGeom prst="ellipse">
@@ -13711,7 +13616,7 @@
         </p:nvSpPr>
         <p:spPr>
           <a:xfrm>
-            <a:off x="7175706" y="4676013"/>
+            <a:off x="8103923" y="4676013"/>
             <a:ext cx="310896" cy="310896"/>
           </a:xfrm>
           <a:prstGeom prst="rect">
@@ -13750,8 +13655,8 @@
         </p:nvSpPr>
         <p:spPr>
           <a:xfrm>
-            <a:off x="7651194" y="4496562"/>
-            <a:ext cx="3870246" cy="669798"/>
+            <a:off x="8579411" y="4496562"/>
+            <a:ext cx="2942029" cy="669798"/>
           </a:xfrm>
           <a:prstGeom prst="rect">
             <a:avLst/>
@@ -13940,36 +13845,6 @@
           </a:p>
         </p:txBody>
       </p:sp>
-      <p:pic>
-        <p:nvPicPr>
-          <p:cNvPr id="2" name="Picture 1">
-            <a:extLst>
-              <a:ext uri="{FF2B5EF4-FFF2-40B4-BE49-F238E27FC236}">
-                <a16:creationId xmlns:a16="http://schemas.microsoft.com/office/drawing/2014/main" id="{4370A529-000A-89A9-3AF0-A7DEBA71CFEC}"/>
-              </a:ext>
-            </a:extLst>
-          </p:cNvPr>
-          <p:cNvPicPr>
-            <a:picLocks noChangeAspect="1"/>
-          </p:cNvPicPr>
-          <p:nvPr/>
-        </p:nvPicPr>
-        <p:blipFill>
-          <a:blip r:embed="rId4"/>
-          <a:stretch>
-            <a:fillRect/>
-          </a:stretch>
-        </p:blipFill>
-        <p:spPr>
-          <a:xfrm>
-            <a:off x="320040" y="1353312"/>
-            <a:ext cx="6371034" cy="3909392"/>
-          </a:xfrm>
-          <a:prstGeom prst="rect">
-            <a:avLst/>
-          </a:prstGeom>
-        </p:spPr>
-      </p:pic>
     </p:spTree>
     <p:extLst>
       <p:ext uri="{BB962C8B-B14F-4D97-AF65-F5344CB8AC3E}">
